--- a/courses/learn_legalization/module02-03-overlap-removal/slides.pptx
+++ b/courses/learn_legalization/module02-03-overlap-removal/slides.pptx
@@ -16,6 +16,9 @@
     <p:sldId id="264" r:id="rId16"/>
     <p:sldId id="265" r:id="rId17"/>
     <p:sldId id="266" r:id="rId18"/>
+    <p:sldId id="267" r:id="rId19"/>
+    <p:sldId id="268" r:id="rId20"/>
+    <p:sldId id="269" r:id="rId21"/>
   </p:sldIdLst>
   <p:sldSz cx="12191695" cy="6858000" type="screen4x3"/>
   <p:notesSz cx="6858000" cy="9144000"/>
@@ -582,7 +585,7 @@
           <a:lstStyle/>
           <a:p>
             <a:r>
-              <a:t>Common traps: assuming snap alone legalizes; forgetting site width when checking overlap; ignoring fixed macro D at (8, 4); reporting HPWL without legality; and comparing Abacus and Tetris without naming displacement versus wirelength tradeoffs.</a:t>
+              <a:t>In the browser lab track, open the **overlap-removal** lab from the tools shelf. Open the interactive lab, place or snap cells on the site and row grid—or use an Apply helper—then Check. Reveal golden is study-only. Work the challenges that lock the goldens, then come back to implement the same loop yourself.</a:t>
             </a:r>
           </a:p>
         </p:txBody>
@@ -652,6 +655,146 @@
           <a:lstStyle/>
           <a:p>
             <a:r>
+              <a:t>In the implement track, open this module's EXAMPLES.md Pseudocode section and the course common solvers. Parse `tiny_legal.json`, run the algorithm with deterministic coordinates, and print legality, displacement, and HPWL. Match the browser goldens before you claim the checklist.</a:t>
+            </a:r>
+          </a:p>
+        </p:txBody>
+      </p:sp>
+      <p:sp>
+        <p:nvSpPr>
+          <p:cNvPr id="4" name="Slide Number Placeholder 3"/>
+          <p:cNvSpPr>
+            <a:spLocks noGrp="1"/>
+          </p:cNvSpPr>
+          <p:nvPr>
+            <p:ph type="sldNum" idx="5" sz="quarter"/>
+          </p:nvPr>
+        </p:nvSpPr>
+        <p:spPr/>
+      </p:sp>
+    </p:spTree>
+  </p:cSld>
+  <p:clrMapOvr>
+    <a:masterClrMapping/>
+  </p:clrMapOvr>
+</p:notes>
+</file>
+
+<file path=ppt/notesSlides/notesSlide12.xml><?xml version="1.0" encoding="utf-8"?>
+<p:notes xmlns:a="http://schemas.openxmlformats.org/drawingml/2006/main" xmlns:p="http://schemas.openxmlformats.org/presentationml/2006/main" xmlns:r="http://schemas.openxmlformats.org/officeDocument/2006/relationships">
+  <p:cSld>
+    <p:spTree>
+      <p:nvGrpSpPr>
+        <p:cNvPr id="1" name=""/>
+        <p:cNvGrpSpPr/>
+        <p:nvPr/>
+      </p:nvGrpSpPr>
+      <p:grpSpPr>
+        <a:xfrm>
+          <a:off x="0" y="0"/>
+          <a:ext cx="0" cy="0"/>
+          <a:chOff x="0" y="0"/>
+          <a:chExt cx="0" cy="0"/>
+        </a:xfrm>
+      </p:grpSpPr>
+      <p:sp>
+        <p:nvSpPr>
+          <p:cNvPr id="2" name="Slide Image Placeholder 1"/>
+          <p:cNvSpPr>
+            <a:spLocks noGrp="1"/>
+          </p:cNvSpPr>
+          <p:nvPr>
+            <p:ph type="sldImg" idx="2"/>
+          </p:nvPr>
+        </p:nvSpPr>
+        <p:spPr/>
+      </p:sp>
+      <p:sp>
+        <p:nvSpPr>
+          <p:cNvPr id="3" name="Notes Placeholder 2"/>
+          <p:cNvSpPr>
+            <a:spLocks noGrp="1"/>
+          </p:cNvSpPr>
+          <p:nvPr>
+            <p:ph type="body" idx="3" sz="quarter"/>
+          </p:nvPr>
+        </p:nvSpPr>
+        <p:spPr/>
+        <p:txBody>
+          <a:bodyPr/>
+          <a:lstStyle/>
+          <a:p>
+            <a:r>
+              <a:t>Common traps: assuming snap alone legalizes; forgetting site width when checking overlap; ignoring fixed macro D at (8, 4); reporting HPWL without legality; and comparing Abacus and Tetris without naming displacement versus wirelength tradeoffs.</a:t>
+            </a:r>
+          </a:p>
+        </p:txBody>
+      </p:sp>
+      <p:sp>
+        <p:nvSpPr>
+          <p:cNvPr id="4" name="Slide Number Placeholder 3"/>
+          <p:cNvSpPr>
+            <a:spLocks noGrp="1"/>
+          </p:cNvSpPr>
+          <p:nvPr>
+            <p:ph type="sldNum" idx="5" sz="quarter"/>
+          </p:nvPr>
+        </p:nvSpPr>
+        <p:spPr/>
+      </p:sp>
+    </p:spTree>
+  </p:cSld>
+  <p:clrMapOvr>
+    <a:masterClrMapping/>
+  </p:clrMapOvr>
+</p:notes>
+</file>
+
+<file path=ppt/notesSlides/notesSlide13.xml><?xml version="1.0" encoding="utf-8"?>
+<p:notes xmlns:a="http://schemas.openxmlformats.org/drawingml/2006/main" xmlns:p="http://schemas.openxmlformats.org/presentationml/2006/main" xmlns:r="http://schemas.openxmlformats.org/officeDocument/2006/relationships">
+  <p:cSld>
+    <p:spTree>
+      <p:nvGrpSpPr>
+        <p:cNvPr id="1" name=""/>
+        <p:cNvGrpSpPr/>
+        <p:nvPr/>
+      </p:nvGrpSpPr>
+      <p:grpSpPr>
+        <a:xfrm>
+          <a:off x="0" y="0"/>
+          <a:ext cx="0" cy="0"/>
+          <a:chOff x="0" y="0"/>
+          <a:chExt cx="0" cy="0"/>
+        </a:xfrm>
+      </p:grpSpPr>
+      <p:sp>
+        <p:nvSpPr>
+          <p:cNvPr id="2" name="Slide Image Placeholder 1"/>
+          <p:cNvSpPr>
+            <a:spLocks noGrp="1"/>
+          </p:cNvSpPr>
+          <p:nvPr>
+            <p:ph type="sldImg" idx="2"/>
+          </p:nvPr>
+        </p:nvSpPr>
+        <p:spPr/>
+      </p:sp>
+      <p:sp>
+        <p:nvSpPr>
+          <p:cNvPr id="3" name="Notes Placeholder 2"/>
+          <p:cNvSpPr>
+            <a:spLocks noGrp="1"/>
+          </p:cNvSpPr>
+          <p:nvPr>
+            <p:ph type="body" idx="3" sz="quarter"/>
+          </p:nvPr>
+        </p:nvSpPr>
+        <p:spPr/>
+        <p:txBody>
+          <a:bodyPr/>
+          <a:lstStyle/>
+          <a:p>
+            <a:r>
               <a:t>Complete the checklist for at least one track—preferably both. Implement until your metrics match the starter goldens. When you're ready, take the short quiz, then continue to the next module.</a:t>
             </a:r>
           </a:p>
@@ -725,12 +868,6 @@
               <a:t>Sort movables by x within each row and place left without overlap. D, E, and F keep their seed roles on other rows. This is the same shelf pack Tetris uses—simple, deterministic, and a good global legalize baseline.</a:t>
             </a:r>
           </a:p>
-          <a:p/>
-          <a:p>
-            <a:r>
-              <a:t>&lt;!-- algorithm-walkthrough --&gt;</a:t>
-            </a:r>
-          </a:p>
         </p:txBody>
       </p:sp>
       <p:sp>
@@ -798,7 +935,13 @@
           <a:lstStyle/>
           <a:p>
             <a:r>
-              <a:t>The overlap seed piles three width-two cells on the middle row at x equals four. Greedy snap would leave the same conflict—overlap removal snaps first, then packs each row left-to-right.</a:t>
+              <a:t>Overlap removal is a two-phase sketch: snap first, then pack each row. Pseudocode makes the phases explicit so you do not merge them into one vague “fix overlaps” bullet.</a:t>
+            </a:r>
+          </a:p>
+          <a:p/>
+          <a:p>
+            <a:r>
+              <a:t>Open this module's examples file and find the Pseudocode section. That written sketch is what you implement on the implement track and what the browser challenges measure.</a:t>
             </a:r>
           </a:p>
         </p:txBody>
@@ -868,7 +1011,7 @@
           <a:lstStyle/>
           <a:p>
             <a:r>
-              <a:t>Snapping the overlap seed does not separate A, B, and C—they remain on (4, 2). Overlap removal keeps their row assignment and resolves x conflicts by packing.</a:t>
+              <a:t>Inside each row, sort by x and place left without interval overlap, skipping fixed macro blocks. On the teaching seed that yields A at four, B at six, C at eight on the middle row—displacement six, HPWL thirty-two.</a:t>
             </a:r>
           </a:p>
         </p:txBody>
@@ -938,7 +1081,7 @@
           <a:lstStyle/>
           <a:p>
             <a:r>
-              <a:t>On row y equals two, sort by x and place left without overlap: A at four, B at six, C at eight. Each width-two cell occupies two consecutive sites—now legal on that row.</a:t>
+              <a:t>The overlap seed piles three width-two cells on the middle row at x equals four. Greedy snap would leave the same conflict—overlap removal snaps first, then packs each row left-to-right.</a:t>
             </a:r>
           </a:p>
         </p:txBody>
@@ -1008,7 +1151,7 @@
           <a:lstStyle/>
           <a:p>
             <a:r>
-              <a:t>Full overlap removal on the seed is legal with total displacement six and HPWL thirty-two. D, E, and F never moved from their overlap-seed roles.</a:t>
+              <a:t>Snapping the overlap seed does not separate A, B, and C—they remain on (4, 2). Overlap removal keeps their row assignment and resolves x conflicts by packing.</a:t>
             </a:r>
           </a:p>
         </p:txBody>
@@ -1078,13 +1221,7 @@
           <a:lstStyle/>
           <a:p>
             <a:r>
-              <a:t>Macro-sized D stays at (8, 4), E at (0, 4), F at (10, 0). Overlap removal only repacked the crowded middle row—fixed-looking cells on other rows are untouched.</a:t>
-            </a:r>
-          </a:p>
-          <a:p/>
-          <a:p>
-            <a:r>
-              <a:t>&lt;!-- /algorithm-walkthrough --&gt;</a:t>
+              <a:t>On row y equals two, sort by x and place left without overlap: A at four, B at six, C at eight. Each width-two cell occupies two consecutive sites—now legal on that row.</a:t>
             </a:r>
           </a:p>
         </p:txBody>
@@ -1154,7 +1291,7 @@
           <a:lstStyle/>
           <a:p>
             <a:r>
-              <a:t>In the browser lab track, open the **overlap-removal** lab from the tools shelf. Load the overlap or float starter, run the legalizer once, and read legality plus displacement and HPWL when the panel shows them. Work the challenges that lock the goldens, then come back to implement the same loop yourself.</a:t>
+              <a:t>Full overlap removal on the seed is legal with total displacement six and HPWL thirty-two. D, E, and F never moved from their overlap-seed roles.</a:t>
             </a:r>
           </a:p>
         </p:txBody>
@@ -1224,7 +1361,7 @@
           <a:lstStyle/>
           <a:p>
             <a:r>
-              <a:t>In the implement track, open this module's examples and the course `common/` solvers. Parse `tiny_legal.json`, run the algorithm with deterministic coordinates, and print legality, displacement, and HPWL. Match the browser goldens before you claim the checklist.</a:t>
+              <a:t>Macro-sized D stays at (8, 4), E at (0, 4), F at (10, 0). Overlap removal only repacked the crowded middle row—fixed-looking cells on other rows are untouched.</a:t>
             </a:r>
           </a:p>
         </p:txBody>
@@ -4382,21 +4519,45 @@
                 </a:solidFill>
                 <a:latin typeface="Calibri"/>
               </a:rPr>
-              <a:t>Pitfalls</a:t>
-            </a:r>
-          </a:p>
-        </p:txBody>
-      </p:sp>
-      <p:sp>
-        <p:nvSpPr>
-          <p:cNvPr id="3" name="TextBox 2"/>
+              <a:t>D, E, F unchanged</a:t>
+            </a:r>
+          </a:p>
+        </p:txBody>
+      </p:sp>
+      <p:pic>
+        <p:nvPicPr>
+          <p:cNvPr id="3" name="Picture 2" descr="05-unchanged.png"/>
+          <p:cNvPicPr>
+            <a:picLocks noChangeAspect="1"/>
+          </p:cNvPicPr>
+          <p:nvPr/>
+        </p:nvPicPr>
+        <p:blipFill>
+          <a:blip r:embed="rId2"/>
+          <a:stretch>
+            <a:fillRect/>
+          </a:stretch>
+        </p:blipFill>
+        <p:spPr>
+          <a:xfrm>
+            <a:off x="548640" y="1143000"/>
+            <a:ext cx="9404113" cy="4572000"/>
+          </a:xfrm>
+          <a:prstGeom prst="rect">
+            <a:avLst/>
+          </a:prstGeom>
+        </p:spPr>
+      </p:pic>
+      <p:sp>
+        <p:nvSpPr>
+          <p:cNvPr id="4" name="TextBox 3"/>
           <p:cNvSpPr txBox="1"/>
           <p:nvPr/>
         </p:nvSpPr>
         <p:spPr>
           <a:xfrm>
-            <a:off x="548640" y="1234440"/>
-            <a:ext cx="11064240" cy="4937760"/>
+            <a:off x="548640" y="5897880"/>
+            <a:ext cx="11064240" cy="411480"/>
           </a:xfrm>
           <a:prstGeom prst="rect">
             <a:avLst/>
@@ -4409,32 +4570,26 @@
           </a:bodyPr>
           <a:lstStyle/>
           <a:p>
-            <a:pPr lvl="0" marL="457200" indent="-228600">
-              <a:buFont typeface="Calibri"/>
-              <a:spcAft>
-                <a:spcPts val="1000"/>
-              </a:spcAft>
-              <a:buSzPct val="100000"/>
-              <a:buChar char="•"/>
+            <a:pPr>
               <a:lnSpc>
                 <a:spcPts val="2200"/>
               </a:lnSpc>
             </a:pPr>
             <a:r>
-              <a:rPr sz="2000" b="0">
+              <a:rPr sz="1200" b="0">
                 <a:solidFill>
                   <a:srgbClr val="333333"/>
                 </a:solidFill>
                 <a:latin typeface="Calibri"/>
               </a:rPr>
-              <a:t>Common traps</a:t>
-            </a:r>
-          </a:p>
-        </p:txBody>
-      </p:sp>
-      <p:sp>
-        <p:nvSpPr>
-          <p:cNvPr id="4" name="TextBox 3"/>
+              <a:t>D, E, F unchanged</a:t>
+            </a:r>
+          </a:p>
+        </p:txBody>
+      </p:sp>
+      <p:sp>
+        <p:nvSpPr>
+          <p:cNvPr id="5" name="TextBox 4"/>
           <p:cNvSpPr txBox="1"/>
           <p:nvPr/>
         </p:nvSpPr>
@@ -4523,6 +4678,557 @@
                 </a:solidFill>
                 <a:latin typeface="Calibri"/>
               </a:rPr>
+              <a:t>Browser lab track</a:t>
+            </a:r>
+          </a:p>
+        </p:txBody>
+      </p:sp>
+      <p:sp>
+        <p:nvSpPr>
+          <p:cNvPr id="3" name="TextBox 2"/>
+          <p:cNvSpPr txBox="1"/>
+          <p:nvPr/>
+        </p:nvSpPr>
+        <p:spPr>
+          <a:xfrm>
+            <a:off x="548640" y="1234440"/>
+            <a:ext cx="11064240" cy="4937760"/>
+          </a:xfrm>
+          <a:prstGeom prst="rect">
+            <a:avLst/>
+          </a:prstGeom>
+          <a:noFill/>
+        </p:spPr>
+        <p:txBody>
+          <a:bodyPr wrap="square">
+            <a:noAutofit/>
+          </a:bodyPr>
+          <a:lstStyle/>
+          <a:p>
+            <a:pPr lvl="0" marL="457200" indent="-228600">
+              <a:buFont typeface="Calibri"/>
+              <a:spcAft>
+                <a:spcPts val="1000"/>
+              </a:spcAft>
+              <a:buSzPct val="100000"/>
+              <a:buChar char="•"/>
+              <a:lnSpc>
+                <a:spcPts val="2200"/>
+              </a:lnSpc>
+            </a:pPr>
+            <a:r>
+              <a:rPr sz="2000" b="0">
+                <a:solidFill>
+                  <a:srgbClr val="333333"/>
+                </a:solidFill>
+                <a:latin typeface="Calibri"/>
+              </a:rPr>
+              <a:t>In the browser lab track, open the </a:t>
+            </a:r>
+            <a:r>
+              <a:rPr sz="2000" b="1">
+                <a:solidFill>
+                  <a:srgbClr val="333333"/>
+                </a:solidFill>
+                <a:latin typeface="Calibri"/>
+              </a:rPr>
+              <a:t>overlap-removal</a:t>
+            </a:r>
+            <a:r>
+              <a:rPr sz="2000" b="0">
+                <a:solidFill>
+                  <a:srgbClr val="333333"/>
+                </a:solidFill>
+                <a:latin typeface="Calibri"/>
+              </a:rPr>
+              <a:t> lab from the tools shelf</a:t>
+            </a:r>
+          </a:p>
+          <a:p>
+            <a:pPr lvl="0" marL="457200" indent="-228600">
+              <a:buFont typeface="Calibri"/>
+              <a:spcAft>
+                <a:spcPts val="1000"/>
+              </a:spcAft>
+              <a:buSzPct val="100000"/>
+              <a:buChar char="•"/>
+              <a:lnSpc>
+                <a:spcPts val="2200"/>
+              </a:lnSpc>
+            </a:pPr>
+            <a:r>
+              <a:rPr sz="2000" b="0">
+                <a:solidFill>
+                  <a:srgbClr val="333333"/>
+                </a:solidFill>
+                <a:latin typeface="Calibri"/>
+              </a:rPr>
+              <a:t>Open the interactive lab</a:t>
+            </a:r>
+          </a:p>
+          <a:p>
+            <a:pPr lvl="0" marL="457200" indent="-228600">
+              <a:buFont typeface="Calibri"/>
+              <a:spcAft>
+                <a:spcPts val="1000"/>
+              </a:spcAft>
+              <a:buSzPct val="100000"/>
+              <a:buChar char="•"/>
+              <a:lnSpc>
+                <a:spcPts val="2200"/>
+              </a:lnSpc>
+            </a:pPr>
+            <a:r>
+              <a:rPr sz="2000" b="0">
+                <a:solidFill>
+                  <a:srgbClr val="333333"/>
+                </a:solidFill>
+                <a:latin typeface="Calibri"/>
+              </a:rPr>
+              <a:t>Reveal golden is study-only</a:t>
+            </a:r>
+          </a:p>
+          <a:p>
+            <a:pPr lvl="0" marL="457200" indent="-228600">
+              <a:buFont typeface="Calibri"/>
+              <a:spcAft>
+                <a:spcPts val="1000"/>
+              </a:spcAft>
+              <a:buSzPct val="100000"/>
+              <a:buChar char="•"/>
+              <a:lnSpc>
+                <a:spcPts val="2200"/>
+              </a:lnSpc>
+            </a:pPr>
+            <a:r>
+              <a:rPr sz="2000" b="0">
+                <a:solidFill>
+                  <a:srgbClr val="333333"/>
+                </a:solidFill>
+                <a:latin typeface="Calibri"/>
+              </a:rPr>
+              <a:t>Work the challenges that lock the goldens</a:t>
+            </a:r>
+          </a:p>
+        </p:txBody>
+      </p:sp>
+      <p:sp>
+        <p:nvSpPr>
+          <p:cNvPr id="4" name="TextBox 3"/>
+          <p:cNvSpPr txBox="1"/>
+          <p:nvPr/>
+        </p:nvSpPr>
+        <p:spPr>
+          <a:xfrm>
+            <a:off x="548640" y="6355080"/>
+            <a:ext cx="11064240" cy="320040"/>
+          </a:xfrm>
+          <a:prstGeom prst="rect">
+            <a:avLst/>
+          </a:prstGeom>
+          <a:noFill/>
+        </p:spPr>
+        <p:txBody>
+          <a:bodyPr wrap="square">
+            <a:noAutofit/>
+          </a:bodyPr>
+          <a:lstStyle/>
+          <a:p>
+            <a:pPr algn="r">
+              <a:lnSpc>
+                <a:spcPts val="2200"/>
+              </a:lnSpc>
+              <a:defRPr sz="1000" b="0">
+                <a:solidFill>
+                  <a:srgbClr val="666666"/>
+                </a:solidFill>
+                <a:latin typeface="Calibri"/>
+              </a:defRPr>
+            </a:pPr>
+            <a:r>
+              <a:t>learn_legalization — 03 overlap removal</a:t>
+            </a:r>
+          </a:p>
+        </p:txBody>
+      </p:sp>
+    </p:spTree>
+  </p:cSld>
+  <p:clrMapOvr>
+    <a:masterClrMapping/>
+  </p:clrMapOvr>
+</p:sld>
+</file>
+
+<file path=ppt/slides/slide12.xml><?xml version="1.0" encoding="utf-8"?>
+<p:sld xmlns:a="http://schemas.openxmlformats.org/drawingml/2006/main" xmlns:p="http://schemas.openxmlformats.org/presentationml/2006/main" xmlns:r="http://schemas.openxmlformats.org/officeDocument/2006/relationships">
+  <p:cSld>
+    <p:spTree>
+      <p:nvGrpSpPr>
+        <p:cNvPr id="1" name=""/>
+        <p:cNvGrpSpPr/>
+        <p:nvPr/>
+      </p:nvGrpSpPr>
+      <p:grpSpPr/>
+      <p:sp>
+        <p:nvSpPr>
+          <p:cNvPr id="2" name="TextBox 1"/>
+          <p:cNvSpPr txBox="1"/>
+          <p:nvPr/>
+        </p:nvSpPr>
+        <p:spPr>
+          <a:xfrm>
+            <a:off x="548640" y="411480"/>
+            <a:ext cx="11064240" cy="777240"/>
+          </a:xfrm>
+          <a:prstGeom prst="rect">
+            <a:avLst/>
+          </a:prstGeom>
+          <a:noFill/>
+        </p:spPr>
+        <p:txBody>
+          <a:bodyPr wrap="square">
+            <a:noAutofit/>
+          </a:bodyPr>
+          <a:lstStyle/>
+          <a:p>
+            <a:pPr>
+              <a:lnSpc>
+                <a:spcPts val="2200"/>
+              </a:lnSpc>
+            </a:pPr>
+            <a:r>
+              <a:rPr sz="2800" b="1">
+                <a:solidFill>
+                  <a:srgbClr val="1A1A2E"/>
+                </a:solidFill>
+                <a:latin typeface="Calibri"/>
+              </a:rPr>
+              <a:t>Implement track</a:t>
+            </a:r>
+          </a:p>
+        </p:txBody>
+      </p:sp>
+      <p:sp>
+        <p:nvSpPr>
+          <p:cNvPr id="3" name="TextBox 2"/>
+          <p:cNvSpPr txBox="1"/>
+          <p:nvPr/>
+        </p:nvSpPr>
+        <p:spPr>
+          <a:xfrm>
+            <a:off x="548640" y="1234440"/>
+            <a:ext cx="11064240" cy="4937760"/>
+          </a:xfrm>
+          <a:prstGeom prst="rect">
+            <a:avLst/>
+          </a:prstGeom>
+          <a:noFill/>
+        </p:spPr>
+        <p:txBody>
+          <a:bodyPr wrap="square">
+            <a:noAutofit/>
+          </a:bodyPr>
+          <a:lstStyle/>
+          <a:p>
+            <a:pPr lvl="0" marL="457200" indent="-228600">
+              <a:buFont typeface="Calibri"/>
+              <a:spcAft>
+                <a:spcPts val="1000"/>
+              </a:spcAft>
+              <a:buSzPct val="100000"/>
+              <a:buChar char="•"/>
+              <a:lnSpc>
+                <a:spcPts val="2200"/>
+              </a:lnSpc>
+            </a:pPr>
+            <a:r>
+              <a:rPr sz="2000" b="0">
+                <a:solidFill>
+                  <a:srgbClr val="333333"/>
+                </a:solidFill>
+                <a:latin typeface="Calibri"/>
+              </a:rPr>
+              <a:t>In the implement track</a:t>
+            </a:r>
+          </a:p>
+          <a:p>
+            <a:pPr lvl="0" marL="457200" indent="-228600">
+              <a:buFont typeface="Calibri"/>
+              <a:spcAft>
+                <a:spcPts val="1000"/>
+              </a:spcAft>
+              <a:buSzPct val="100000"/>
+              <a:buChar char="•"/>
+              <a:lnSpc>
+                <a:spcPts val="2200"/>
+              </a:lnSpc>
+            </a:pPr>
+            <a:r>
+              <a:rPr sz="2000" b="0">
+                <a:solidFill>
+                  <a:srgbClr val="333333"/>
+                </a:solidFill>
+                <a:latin typeface="Calibri"/>
+              </a:rPr>
+              <a:t>Parse `tiny_legal.json`, run the algorithm with deterministic coordinates</a:t>
+            </a:r>
+          </a:p>
+          <a:p>
+            <a:pPr lvl="0" marL="457200" indent="-228600">
+              <a:buFont typeface="Calibri"/>
+              <a:spcAft>
+                <a:spcPts val="1000"/>
+              </a:spcAft>
+              <a:buSzPct val="100000"/>
+              <a:buChar char="•"/>
+              <a:lnSpc>
+                <a:spcPts val="2200"/>
+              </a:lnSpc>
+            </a:pPr>
+            <a:r>
+              <a:rPr sz="2000" b="0">
+                <a:solidFill>
+                  <a:srgbClr val="333333"/>
+                </a:solidFill>
+                <a:latin typeface="Calibri"/>
+              </a:rPr>
+              <a:t>Match the browser goldens before you claim the checklist</a:t>
+            </a:r>
+          </a:p>
+        </p:txBody>
+      </p:sp>
+      <p:sp>
+        <p:nvSpPr>
+          <p:cNvPr id="4" name="TextBox 3"/>
+          <p:cNvSpPr txBox="1"/>
+          <p:nvPr/>
+        </p:nvSpPr>
+        <p:spPr>
+          <a:xfrm>
+            <a:off x="548640" y="6355080"/>
+            <a:ext cx="11064240" cy="320040"/>
+          </a:xfrm>
+          <a:prstGeom prst="rect">
+            <a:avLst/>
+          </a:prstGeom>
+          <a:noFill/>
+        </p:spPr>
+        <p:txBody>
+          <a:bodyPr wrap="square">
+            <a:noAutofit/>
+          </a:bodyPr>
+          <a:lstStyle/>
+          <a:p>
+            <a:pPr algn="r">
+              <a:lnSpc>
+                <a:spcPts val="2200"/>
+              </a:lnSpc>
+              <a:defRPr sz="1000" b="0">
+                <a:solidFill>
+                  <a:srgbClr val="666666"/>
+                </a:solidFill>
+                <a:latin typeface="Calibri"/>
+              </a:defRPr>
+            </a:pPr>
+            <a:r>
+              <a:t>learn_legalization — 03 overlap removal</a:t>
+            </a:r>
+          </a:p>
+        </p:txBody>
+      </p:sp>
+    </p:spTree>
+  </p:cSld>
+  <p:clrMapOvr>
+    <a:masterClrMapping/>
+  </p:clrMapOvr>
+</p:sld>
+</file>
+
+<file path=ppt/slides/slide13.xml><?xml version="1.0" encoding="utf-8"?>
+<p:sld xmlns:a="http://schemas.openxmlformats.org/drawingml/2006/main" xmlns:p="http://schemas.openxmlformats.org/presentationml/2006/main" xmlns:r="http://schemas.openxmlformats.org/officeDocument/2006/relationships">
+  <p:cSld>
+    <p:spTree>
+      <p:nvGrpSpPr>
+        <p:cNvPr id="1" name=""/>
+        <p:cNvGrpSpPr/>
+        <p:nvPr/>
+      </p:nvGrpSpPr>
+      <p:grpSpPr/>
+      <p:sp>
+        <p:nvSpPr>
+          <p:cNvPr id="2" name="TextBox 1"/>
+          <p:cNvSpPr txBox="1"/>
+          <p:nvPr/>
+        </p:nvSpPr>
+        <p:spPr>
+          <a:xfrm>
+            <a:off x="548640" y="411480"/>
+            <a:ext cx="11064240" cy="777240"/>
+          </a:xfrm>
+          <a:prstGeom prst="rect">
+            <a:avLst/>
+          </a:prstGeom>
+          <a:noFill/>
+        </p:spPr>
+        <p:txBody>
+          <a:bodyPr wrap="square">
+            <a:noAutofit/>
+          </a:bodyPr>
+          <a:lstStyle/>
+          <a:p>
+            <a:pPr>
+              <a:lnSpc>
+                <a:spcPts val="2200"/>
+              </a:lnSpc>
+            </a:pPr>
+            <a:r>
+              <a:rPr sz="2800" b="1">
+                <a:solidFill>
+                  <a:srgbClr val="1A1A2E"/>
+                </a:solidFill>
+                <a:latin typeface="Calibri"/>
+              </a:rPr>
+              <a:t>Pitfalls</a:t>
+            </a:r>
+          </a:p>
+        </p:txBody>
+      </p:sp>
+      <p:sp>
+        <p:nvSpPr>
+          <p:cNvPr id="3" name="TextBox 2"/>
+          <p:cNvSpPr txBox="1"/>
+          <p:nvPr/>
+        </p:nvSpPr>
+        <p:spPr>
+          <a:xfrm>
+            <a:off x="548640" y="1234440"/>
+            <a:ext cx="11064240" cy="4937760"/>
+          </a:xfrm>
+          <a:prstGeom prst="rect">
+            <a:avLst/>
+          </a:prstGeom>
+          <a:noFill/>
+        </p:spPr>
+        <p:txBody>
+          <a:bodyPr wrap="square">
+            <a:noAutofit/>
+          </a:bodyPr>
+          <a:lstStyle/>
+          <a:p>
+            <a:pPr lvl="0" marL="457200" indent="-228600">
+              <a:buFont typeface="Calibri"/>
+              <a:spcAft>
+                <a:spcPts val="1000"/>
+              </a:spcAft>
+              <a:buSzPct val="100000"/>
+              <a:buChar char="•"/>
+              <a:lnSpc>
+                <a:spcPts val="2200"/>
+              </a:lnSpc>
+            </a:pPr>
+            <a:r>
+              <a:rPr sz="2000" b="0">
+                <a:solidFill>
+                  <a:srgbClr val="333333"/>
+                </a:solidFill>
+                <a:latin typeface="Calibri"/>
+              </a:rPr>
+              <a:t>Common traps</a:t>
+            </a:r>
+          </a:p>
+        </p:txBody>
+      </p:sp>
+      <p:sp>
+        <p:nvSpPr>
+          <p:cNvPr id="4" name="TextBox 3"/>
+          <p:cNvSpPr txBox="1"/>
+          <p:nvPr/>
+        </p:nvSpPr>
+        <p:spPr>
+          <a:xfrm>
+            <a:off x="548640" y="6355080"/>
+            <a:ext cx="11064240" cy="320040"/>
+          </a:xfrm>
+          <a:prstGeom prst="rect">
+            <a:avLst/>
+          </a:prstGeom>
+          <a:noFill/>
+        </p:spPr>
+        <p:txBody>
+          <a:bodyPr wrap="square">
+            <a:noAutofit/>
+          </a:bodyPr>
+          <a:lstStyle/>
+          <a:p>
+            <a:pPr algn="r">
+              <a:lnSpc>
+                <a:spcPts val="2200"/>
+              </a:lnSpc>
+              <a:defRPr sz="1000" b="0">
+                <a:solidFill>
+                  <a:srgbClr val="666666"/>
+                </a:solidFill>
+                <a:latin typeface="Calibri"/>
+              </a:defRPr>
+            </a:pPr>
+            <a:r>
+              <a:t>learn_legalization — 03 overlap removal</a:t>
+            </a:r>
+          </a:p>
+        </p:txBody>
+      </p:sp>
+    </p:spTree>
+  </p:cSld>
+  <p:clrMapOvr>
+    <a:masterClrMapping/>
+  </p:clrMapOvr>
+</p:sld>
+</file>
+
+<file path=ppt/slides/slide14.xml><?xml version="1.0" encoding="utf-8"?>
+<p:sld xmlns:a="http://schemas.openxmlformats.org/drawingml/2006/main" xmlns:p="http://schemas.openxmlformats.org/presentationml/2006/main" xmlns:r="http://schemas.openxmlformats.org/officeDocument/2006/relationships">
+  <p:cSld>
+    <p:spTree>
+      <p:nvGrpSpPr>
+        <p:cNvPr id="1" name=""/>
+        <p:cNvGrpSpPr/>
+        <p:nvPr/>
+      </p:nvGrpSpPr>
+      <p:grpSpPr/>
+      <p:sp>
+        <p:nvSpPr>
+          <p:cNvPr id="2" name="TextBox 1"/>
+          <p:cNvSpPr txBox="1"/>
+          <p:nvPr/>
+        </p:nvSpPr>
+        <p:spPr>
+          <a:xfrm>
+            <a:off x="548640" y="411480"/>
+            <a:ext cx="11064240" cy="777240"/>
+          </a:xfrm>
+          <a:prstGeom prst="rect">
+            <a:avLst/>
+          </a:prstGeom>
+          <a:noFill/>
+        </p:spPr>
+        <p:txBody>
+          <a:bodyPr wrap="square">
+            <a:noAutofit/>
+          </a:bodyPr>
+          <a:lstStyle/>
+          <a:p>
+            <a:pPr>
+              <a:lnSpc>
+                <a:spcPts val="2200"/>
+              </a:lnSpc>
+            </a:pPr>
+            <a:r>
+              <a:rPr sz="2800" b="1">
+                <a:solidFill>
+                  <a:srgbClr val="1A1A2E"/>
+                </a:solidFill>
+                <a:latin typeface="Calibri"/>
+              </a:rPr>
               <a:t>Your turn</a:t>
             </a:r>
           </a:p>
@@ -4800,6 +5506,125 @@
               <a:t>This is the same shelf pack Tetris uses, simple, deterministic</a:t>
             </a:r>
           </a:p>
+        </p:txBody>
+      </p:sp>
+      <p:sp>
+        <p:nvSpPr>
+          <p:cNvPr id="4" name="TextBox 3"/>
+          <p:cNvSpPr txBox="1"/>
+          <p:nvPr/>
+        </p:nvSpPr>
+        <p:spPr>
+          <a:xfrm>
+            <a:off x="548640" y="6355080"/>
+            <a:ext cx="11064240" cy="320040"/>
+          </a:xfrm>
+          <a:prstGeom prst="rect">
+            <a:avLst/>
+          </a:prstGeom>
+          <a:noFill/>
+        </p:spPr>
+        <p:txBody>
+          <a:bodyPr wrap="square">
+            <a:noAutofit/>
+          </a:bodyPr>
+          <a:lstStyle/>
+          <a:p>
+            <a:pPr algn="r">
+              <a:lnSpc>
+                <a:spcPts val="2200"/>
+              </a:lnSpc>
+              <a:defRPr sz="1000" b="0">
+                <a:solidFill>
+                  <a:srgbClr val="666666"/>
+                </a:solidFill>
+                <a:latin typeface="Calibri"/>
+              </a:defRPr>
+            </a:pPr>
+            <a:r>
+              <a:t>learn_legalization — 03 overlap removal</a:t>
+            </a:r>
+          </a:p>
+        </p:txBody>
+      </p:sp>
+    </p:spTree>
+  </p:cSld>
+  <p:clrMapOvr>
+    <a:masterClrMapping/>
+  </p:clrMapOvr>
+</p:sld>
+</file>
+
+<file path=ppt/slides/slide3.xml><?xml version="1.0" encoding="utf-8"?>
+<p:sld xmlns:a="http://schemas.openxmlformats.org/drawingml/2006/main" xmlns:p="http://schemas.openxmlformats.org/presentationml/2006/main" xmlns:r="http://schemas.openxmlformats.org/officeDocument/2006/relationships">
+  <p:cSld>
+    <p:spTree>
+      <p:nvGrpSpPr>
+        <p:cNvPr id="1" name=""/>
+        <p:cNvGrpSpPr/>
+        <p:nvPr/>
+      </p:nvGrpSpPr>
+      <p:grpSpPr/>
+      <p:sp>
+        <p:nvSpPr>
+          <p:cNvPr id="2" name="TextBox 1"/>
+          <p:cNvSpPr txBox="1"/>
+          <p:nvPr/>
+        </p:nvSpPr>
+        <p:spPr>
+          <a:xfrm>
+            <a:off x="548640" y="411480"/>
+            <a:ext cx="11064240" cy="777240"/>
+          </a:xfrm>
+          <a:prstGeom prst="rect">
+            <a:avLst/>
+          </a:prstGeom>
+          <a:noFill/>
+        </p:spPr>
+        <p:txBody>
+          <a:bodyPr wrap="square">
+            <a:noAutofit/>
+          </a:bodyPr>
+          <a:lstStyle/>
+          <a:p>
+            <a:pPr>
+              <a:lnSpc>
+                <a:spcPts val="2200"/>
+              </a:lnSpc>
+            </a:pPr>
+            <a:r>
+              <a:rPr sz="2800" b="1">
+                <a:solidFill>
+                  <a:srgbClr val="1A1A2E"/>
+                </a:solidFill>
+                <a:latin typeface="Calibri"/>
+              </a:rPr>
+              <a:t>Pseudocode</a:t>
+            </a:r>
+          </a:p>
+        </p:txBody>
+      </p:sp>
+      <p:sp>
+        <p:nvSpPr>
+          <p:cNvPr id="3" name="TextBox 2"/>
+          <p:cNvSpPr txBox="1"/>
+          <p:nvPr/>
+        </p:nvSpPr>
+        <p:spPr>
+          <a:xfrm>
+            <a:off x="548640" y="1234440"/>
+            <a:ext cx="11064240" cy="4937760"/>
+          </a:xfrm>
+          <a:prstGeom prst="rect">
+            <a:avLst/>
+          </a:prstGeom>
+          <a:noFill/>
+        </p:spPr>
+        <p:txBody>
+          <a:bodyPr wrap="square">
+            <a:noAutofit/>
+          </a:bodyPr>
+          <a:lstStyle/>
           <a:p>
             <a:pPr lvl="0" marL="457200" indent="-228600">
               <a:buFont typeface="Calibri"/>
@@ -4819,7 +5644,73 @@
                 </a:solidFill>
                 <a:latin typeface="Calibri"/>
               </a:rPr>
-              <a:t>&lt;!-- algorithm-walkthrough --&gt;</a:t>
+              <a:t>Overlap removal is a two-phase sketch: snap first, then pack each row</a:t>
+            </a:r>
+          </a:p>
+          <a:p>
+            <a:pPr lvl="0" marL="457200" indent="-228600">
+              <a:buFont typeface="Calibri"/>
+              <a:spcAft>
+                <a:spcPts val="1000"/>
+              </a:spcAft>
+              <a:buSzPct val="100000"/>
+              <a:buChar char="•"/>
+              <a:lnSpc>
+                <a:spcPts val="2200"/>
+              </a:lnSpc>
+            </a:pPr>
+            <a:r>
+              <a:rPr sz="2000" b="0">
+                <a:solidFill>
+                  <a:srgbClr val="333333"/>
+                </a:solidFill>
+                <a:latin typeface="Calibri"/>
+              </a:rPr>
+              <a:t>Pseudocode makes the phases explicit so you do not merge them into one vague “fix</a:t>
+            </a:r>
+          </a:p>
+          <a:p>
+            <a:pPr lvl="0" marL="457200" indent="-228600">
+              <a:buFont typeface="Calibri"/>
+              <a:spcAft>
+                <a:spcPts val="1000"/>
+              </a:spcAft>
+              <a:buSzPct val="100000"/>
+              <a:buChar char="•"/>
+              <a:lnSpc>
+                <a:spcPts val="2200"/>
+              </a:lnSpc>
+            </a:pPr>
+            <a:r>
+              <a:rPr sz="2000" b="0">
+                <a:solidFill>
+                  <a:srgbClr val="333333"/>
+                </a:solidFill>
+                <a:latin typeface="Calibri"/>
+              </a:rPr>
+              <a:t>Open this module's examples file and find the Pseudocode section</a:t>
+            </a:r>
+          </a:p>
+          <a:p>
+            <a:pPr lvl="0" marL="457200" indent="-228600">
+              <a:buFont typeface="Calibri"/>
+              <a:spcAft>
+                <a:spcPts val="1000"/>
+              </a:spcAft>
+              <a:buSzPct val="100000"/>
+              <a:buChar char="•"/>
+              <a:lnSpc>
+                <a:spcPts val="2200"/>
+              </a:lnSpc>
+            </a:pPr>
+            <a:r>
+              <a:rPr sz="2000" b="0">
+                <a:solidFill>
+                  <a:srgbClr val="333333"/>
+                </a:solidFill>
+                <a:latin typeface="Calibri"/>
+              </a:rPr>
+              <a:t>That written sketch is what you implement on the implement track and what the browser</a:t>
             </a:r>
           </a:p>
         </p:txBody>
@@ -4871,7 +5762,424 @@
 </p:sld>
 </file>
 
-<file path=ppt/slides/slide3.xml><?xml version="1.0" encoding="utf-8"?>
+<file path=ppt/slides/slide4.xml><?xml version="1.0" encoding="utf-8"?>
+<p:sld xmlns:a="http://schemas.openxmlformats.org/drawingml/2006/main" xmlns:p="http://schemas.openxmlformats.org/presentationml/2006/main" xmlns:r="http://schemas.openxmlformats.org/officeDocument/2006/relationships">
+  <p:cSld>
+    <p:spTree>
+      <p:nvGrpSpPr>
+        <p:cNvPr id="1" name=""/>
+        <p:cNvGrpSpPr/>
+        <p:nvPr/>
+      </p:nvGrpSpPr>
+      <p:grpSpPr/>
+      <p:sp>
+        <p:nvSpPr>
+          <p:cNvPr id="2" name="TextBox 1"/>
+          <p:cNvSpPr txBox="1"/>
+          <p:nvPr/>
+        </p:nvSpPr>
+        <p:spPr>
+          <a:xfrm>
+            <a:off x="548640" y="411480"/>
+            <a:ext cx="11064240" cy="777240"/>
+          </a:xfrm>
+          <a:prstGeom prst="rect">
+            <a:avLst/>
+          </a:prstGeom>
+          <a:noFill/>
+        </p:spPr>
+        <p:txBody>
+          <a:bodyPr wrap="square">
+            <a:noAutofit/>
+          </a:bodyPr>
+          <a:lstStyle/>
+          <a:p>
+            <a:pPr>
+              <a:lnSpc>
+                <a:spcPts val="2200"/>
+              </a:lnSpc>
+            </a:pPr>
+            <a:r>
+              <a:rPr sz="2800" b="1">
+                <a:solidFill>
+                  <a:srgbClr val="1A1A2E"/>
+                </a:solidFill>
+                <a:latin typeface="Calibri"/>
+              </a:rPr>
+              <a:t>Algorithm sketch</a:t>
+            </a:r>
+          </a:p>
+        </p:txBody>
+      </p:sp>
+      <p:sp>
+        <p:nvSpPr>
+          <p:cNvPr id="3" name="TextBox 2"/>
+          <p:cNvSpPr txBox="1"/>
+          <p:nvPr/>
+        </p:nvSpPr>
+        <p:spPr>
+          <a:xfrm>
+            <a:off x="548640" y="1234440"/>
+            <a:ext cx="11064240" cy="4937760"/>
+          </a:xfrm>
+          <a:prstGeom prst="rect">
+            <a:avLst/>
+          </a:prstGeom>
+          <a:noFill/>
+        </p:spPr>
+        <p:txBody>
+          <a:bodyPr wrap="square">
+            <a:noAutofit/>
+          </a:bodyPr>
+          <a:lstStyle/>
+          <a:p>
+            <a:pPr lvl="0" marL="457200" indent="-228600">
+              <a:buFont typeface="Calibri"/>
+              <a:spcAft>
+                <a:spcPts val="1000"/>
+              </a:spcAft>
+              <a:buSzPct val="100000"/>
+              <a:buChar char="•"/>
+              <a:lnSpc>
+                <a:spcPts val="2200"/>
+              </a:lnSpc>
+            </a:pPr>
+            <a:r>
+              <a:rPr sz="2000" b="0">
+                <a:solidFill>
+                  <a:srgbClr val="333333"/>
+                </a:solidFill>
+                <a:latin typeface="Calibri"/>
+              </a:rPr>
+              <a:t>Inside each row</a:t>
+            </a:r>
+          </a:p>
+          <a:p>
+            <a:pPr lvl="0" marL="457200" indent="-228600">
+              <a:buFont typeface="Calibri"/>
+              <a:spcAft>
+                <a:spcPts val="1000"/>
+              </a:spcAft>
+              <a:buSzPct val="100000"/>
+              <a:buChar char="•"/>
+              <a:lnSpc>
+                <a:spcPts val="2200"/>
+              </a:lnSpc>
+            </a:pPr>
+            <a:r>
+              <a:rPr sz="2000" b="0">
+                <a:solidFill>
+                  <a:srgbClr val="333333"/>
+                </a:solidFill>
+                <a:latin typeface="Calibri"/>
+              </a:rPr>
+              <a:t>On the teaching seed that yields A at four</a:t>
+            </a:r>
+          </a:p>
+        </p:txBody>
+      </p:sp>
+      <p:sp>
+        <p:nvSpPr>
+          <p:cNvPr id="4" name="TextBox 3"/>
+          <p:cNvSpPr txBox="1"/>
+          <p:nvPr/>
+        </p:nvSpPr>
+        <p:spPr>
+          <a:xfrm>
+            <a:off x="548640" y="6355080"/>
+            <a:ext cx="11064240" cy="320040"/>
+          </a:xfrm>
+          <a:prstGeom prst="rect">
+            <a:avLst/>
+          </a:prstGeom>
+          <a:noFill/>
+        </p:spPr>
+        <p:txBody>
+          <a:bodyPr wrap="square">
+            <a:noAutofit/>
+          </a:bodyPr>
+          <a:lstStyle/>
+          <a:p>
+            <a:pPr algn="r">
+              <a:lnSpc>
+                <a:spcPts val="2200"/>
+              </a:lnSpc>
+              <a:defRPr sz="1000" b="0">
+                <a:solidFill>
+                  <a:srgbClr val="666666"/>
+                </a:solidFill>
+                <a:latin typeface="Calibri"/>
+              </a:defRPr>
+            </a:pPr>
+            <a:r>
+              <a:t>learn_legalization — 03 overlap removal</a:t>
+            </a:r>
+          </a:p>
+        </p:txBody>
+      </p:sp>
+    </p:spTree>
+  </p:cSld>
+  <p:clrMapOvr>
+    <a:masterClrMapping/>
+  </p:clrMapOvr>
+</p:sld>
+</file>
+
+<file path=ppt/slides/slide5.xml><?xml version="1.0" encoding="utf-8"?>
+<p:sld xmlns:a="http://schemas.openxmlformats.org/drawingml/2006/main" xmlns:p="http://schemas.openxmlformats.org/presentationml/2006/main" xmlns:r="http://schemas.openxmlformats.org/officeDocument/2006/relationships">
+  <p:cSld>
+    <p:spTree>
+      <p:nvGrpSpPr>
+        <p:cNvPr id="1" name=""/>
+        <p:cNvGrpSpPr/>
+        <p:nvPr/>
+      </p:nvGrpSpPr>
+      <p:grpSpPr/>
+      <p:sp>
+        <p:nvSpPr>
+          <p:cNvPr id="2" name="TextBox 1"/>
+          <p:cNvSpPr txBox="1"/>
+          <p:nvPr/>
+        </p:nvSpPr>
+        <p:spPr>
+          <a:xfrm>
+            <a:off x="548640" y="411480"/>
+            <a:ext cx="11064240" cy="777240"/>
+          </a:xfrm>
+          <a:prstGeom prst="rect">
+            <a:avLst/>
+          </a:prstGeom>
+          <a:noFill/>
+        </p:spPr>
+        <p:txBody>
+          <a:bodyPr wrap="square">
+            <a:noAutofit/>
+          </a:bodyPr>
+          <a:lstStyle/>
+          <a:p>
+            <a:pPr>
+              <a:lnSpc>
+                <a:spcPts val="2200"/>
+              </a:lnSpc>
+            </a:pPr>
+            <a:r>
+              <a:rPr sz="2800" b="1">
+                <a:solidFill>
+                  <a:srgbClr val="1A1A2E"/>
+                </a:solidFill>
+                <a:latin typeface="Calibri"/>
+              </a:rPr>
+              <a:t>Algorithm sketch — try these</a:t>
+            </a:r>
+          </a:p>
+        </p:txBody>
+      </p:sp>
+      <p:sp>
+        <p:nvSpPr>
+          <p:cNvPr id="3" name="TextBox 2"/>
+          <p:cNvSpPr txBox="1"/>
+          <p:nvPr/>
+        </p:nvSpPr>
+        <p:spPr>
+          <a:xfrm>
+            <a:off x="548640" y="1143000"/>
+            <a:ext cx="11064240" cy="5029200"/>
+          </a:xfrm>
+          <a:prstGeom prst="rect">
+            <a:avLst/>
+          </a:prstGeom>
+          <a:solidFill>
+            <a:srgbClr val="F4F4F4"/>
+          </a:solidFill>
+        </p:spPr>
+        <p:txBody>
+          <a:bodyPr wrap="square">
+            <a:noAutofit/>
+          </a:bodyPr>
+          <a:lstStyle/>
+          <a:p>
+            <a:pPr>
+              <a:lnSpc>
+                <a:spcPts val="2200"/>
+              </a:lnSpc>
+              <a:spcAft>
+                <a:spcPts val="400"/>
+              </a:spcAft>
+            </a:pPr>
+            <a:r>
+              <a:rPr sz="2000" b="0">
+                <a:solidFill>
+                  <a:srgbClr val="333333"/>
+                </a:solidFill>
+                <a:latin typeface="Consolas"/>
+              </a:rPr>
+              <a:t>INPUT: positions, widths, rows, fixed macros</a:t>
+            </a:r>
+          </a:p>
+          <a:p>
+            <a:pPr>
+              <a:lnSpc>
+                <a:spcPts val="2200"/>
+              </a:lnSpc>
+              <a:spcAft>
+                <a:spcPts val="400"/>
+              </a:spcAft>
+            </a:pPr>
+            <a:r>
+              <a:rPr sz="2000" b="0">
+                <a:solidFill>
+                  <a:srgbClr val="333333"/>
+                </a:solidFill>
+                <a:latin typeface="Consolas"/>
+              </a:rPr>
+              <a:t>OUTPUT: legal packing (if capacity allows)</a:t>
+            </a:r>
+          </a:p>
+          <a:p>
+            <a:pPr>
+              <a:lnSpc>
+                <a:spcPts val="2200"/>
+              </a:lnSpc>
+              <a:spcAft>
+                <a:spcPts val="400"/>
+              </a:spcAft>
+            </a:pPr>
+            <a:r>
+              <a:rPr sz="2000" b="0">
+                <a:solidFill>
+                  <a:srgbClr val="333333"/>
+                </a:solidFill>
+                <a:latin typeface="Consolas"/>
+              </a:rPr>
+              <a:t>snap all movables to sites/rows</a:t>
+            </a:r>
+          </a:p>
+          <a:p>
+            <a:pPr>
+              <a:lnSpc>
+                <a:spcPts val="2200"/>
+              </a:lnSpc>
+              <a:spcAft>
+                <a:spcPts val="400"/>
+              </a:spcAft>
+            </a:pPr>
+            <a:r>
+              <a:rPr sz="2000" b="0">
+                <a:solidFill>
+                  <a:srgbClr val="333333"/>
+                </a:solidFill>
+                <a:latin typeface="Consolas"/>
+              </a:rPr>
+              <a:t>for each row y:</a:t>
+            </a:r>
+          </a:p>
+          <a:p>
+            <a:pPr>
+              <a:lnSpc>
+                <a:spcPts val="2200"/>
+              </a:lnSpc>
+              <a:spcAft>
+                <a:spcPts val="400"/>
+              </a:spcAft>
+            </a:pPr>
+            <a:r>
+              <a:rPr sz="2000" b="0">
+                <a:solidFill>
+                  <a:srgbClr val="333333"/>
+                </a:solidFill>
+                <a:latin typeface="Consolas"/>
+              </a:rPr>
+              <a:t>  sort movables by x; left-pack (skip macros)</a:t>
+            </a:r>
+          </a:p>
+          <a:p>
+            <a:pPr>
+              <a:lnSpc>
+                <a:spcPts val="2200"/>
+              </a:lnSpc>
+              <a:spcAft>
+                <a:spcPts val="400"/>
+              </a:spcAft>
+            </a:pPr>
+            <a:r>
+              <a:rPr sz="2000" b="0">
+                <a:solidFill>
+                  <a:srgbClr val="333333"/>
+                </a:solidFill>
+                <a:latin typeface="Consolas"/>
+              </a:rPr>
+              <a:t>report legal?, disp, HPWL</a:t>
+            </a:r>
+          </a:p>
+          <a:p>
+            <a:pPr>
+              <a:lnSpc>
+                <a:spcPts val="2200"/>
+              </a:lnSpc>
+              <a:spcAft>
+                <a:spcPts val="400"/>
+              </a:spcAft>
+            </a:pPr>
+            <a:r>
+              <a:rPr sz="2000" b="0">
+                <a:solidFill>
+                  <a:srgbClr val="333333"/>
+                </a:solidFill>
+                <a:latin typeface="Consolas"/>
+              </a:rPr>
+              <a:t>GOLDEN: A@4 B@6 C@8 on y=2; disp=6; HPWL=32</a:t>
+            </a:r>
+          </a:p>
+        </p:txBody>
+      </p:sp>
+      <p:sp>
+        <p:nvSpPr>
+          <p:cNvPr id="4" name="TextBox 3"/>
+          <p:cNvSpPr txBox="1"/>
+          <p:nvPr/>
+        </p:nvSpPr>
+        <p:spPr>
+          <a:xfrm>
+            <a:off x="548640" y="6355080"/>
+            <a:ext cx="11064240" cy="320040"/>
+          </a:xfrm>
+          <a:prstGeom prst="rect">
+            <a:avLst/>
+          </a:prstGeom>
+          <a:noFill/>
+        </p:spPr>
+        <p:txBody>
+          <a:bodyPr wrap="square">
+            <a:noAutofit/>
+          </a:bodyPr>
+          <a:lstStyle/>
+          <a:p>
+            <a:pPr algn="r">
+              <a:lnSpc>
+                <a:spcPts val="2200"/>
+              </a:lnSpc>
+              <a:defRPr sz="1000" b="0">
+                <a:solidFill>
+                  <a:srgbClr val="666666"/>
+                </a:solidFill>
+                <a:latin typeface="Calibri"/>
+              </a:defRPr>
+            </a:pPr>
+            <a:r>
+              <a:t>learn_legalization — 03 overlap removal</a:t>
+            </a:r>
+          </a:p>
+        </p:txBody>
+      </p:sp>
+    </p:spTree>
+  </p:cSld>
+  <p:clrMapOvr>
+    <a:masterClrMapping/>
+  </p:clrMapOvr>
+</p:sld>
+</file>
+
+<file path=ppt/slides/slide6.xml><?xml version="1.0" encoding="utf-8"?>
 <p:sld xmlns:a="http://schemas.openxmlformats.org/drawingml/2006/main" xmlns:p="http://schemas.openxmlformats.org/presentationml/2006/main" xmlns:r="http://schemas.openxmlformats.org/officeDocument/2006/relationships">
   <p:cSld>
     <p:spTree>
@@ -5030,7 +6338,7 @@
 </p:sld>
 </file>
 
-<file path=ppt/slides/slide4.xml><?xml version="1.0" encoding="utf-8"?>
+<file path=ppt/slides/slide7.xml><?xml version="1.0" encoding="utf-8"?>
 <p:sld xmlns:a="http://schemas.openxmlformats.org/drawingml/2006/main" xmlns:p="http://schemas.openxmlformats.org/presentationml/2006/main" xmlns:r="http://schemas.openxmlformats.org/officeDocument/2006/relationships">
   <p:cSld>
     <p:spTree>
@@ -5189,7 +6497,7 @@
 </p:sld>
 </file>
 
-<file path=ppt/slides/slide5.xml><?xml version="1.0" encoding="utf-8"?>
+<file path=ppt/slides/slide8.xml><?xml version="1.0" encoding="utf-8"?>
 <p:sld xmlns:a="http://schemas.openxmlformats.org/drawingml/2006/main" xmlns:p="http://schemas.openxmlformats.org/presentationml/2006/main" xmlns:r="http://schemas.openxmlformats.org/officeDocument/2006/relationships">
   <p:cSld>
     <p:spTree>
@@ -5348,7 +6656,7 @@
 </p:sld>
 </file>
 
-<file path=ppt/slides/slide6.xml><?xml version="1.0" encoding="utf-8"?>
+<file path=ppt/slides/slide9.xml><?xml version="1.0" encoding="utf-8"?>
 <p:sld xmlns:a="http://schemas.openxmlformats.org/drawingml/2006/main" xmlns:p="http://schemas.openxmlformats.org/presentationml/2006/main" xmlns:r="http://schemas.openxmlformats.org/officeDocument/2006/relationships">
   <p:cSld>
     <p:spTree>
@@ -5463,553 +6771,6 @@
       <p:sp>
         <p:nvSpPr>
           <p:cNvPr id="5" name="TextBox 4"/>
-          <p:cNvSpPr txBox="1"/>
-          <p:nvPr/>
-        </p:nvSpPr>
-        <p:spPr>
-          <a:xfrm>
-            <a:off x="548640" y="6355080"/>
-            <a:ext cx="11064240" cy="320040"/>
-          </a:xfrm>
-          <a:prstGeom prst="rect">
-            <a:avLst/>
-          </a:prstGeom>
-          <a:noFill/>
-        </p:spPr>
-        <p:txBody>
-          <a:bodyPr wrap="square">
-            <a:noAutofit/>
-          </a:bodyPr>
-          <a:lstStyle/>
-          <a:p>
-            <a:pPr algn="r">
-              <a:lnSpc>
-                <a:spcPts val="2200"/>
-              </a:lnSpc>
-              <a:defRPr sz="1000" b="0">
-                <a:solidFill>
-                  <a:srgbClr val="666666"/>
-                </a:solidFill>
-                <a:latin typeface="Calibri"/>
-              </a:defRPr>
-            </a:pPr>
-            <a:r>
-              <a:t>learn_legalization — 03 overlap removal</a:t>
-            </a:r>
-          </a:p>
-        </p:txBody>
-      </p:sp>
-    </p:spTree>
-  </p:cSld>
-  <p:clrMapOvr>
-    <a:masterClrMapping/>
-  </p:clrMapOvr>
-</p:sld>
-</file>
-
-<file path=ppt/slides/slide7.xml><?xml version="1.0" encoding="utf-8"?>
-<p:sld xmlns:a="http://schemas.openxmlformats.org/drawingml/2006/main" xmlns:p="http://schemas.openxmlformats.org/presentationml/2006/main" xmlns:r="http://schemas.openxmlformats.org/officeDocument/2006/relationships">
-  <p:cSld>
-    <p:spTree>
-      <p:nvGrpSpPr>
-        <p:cNvPr id="1" name=""/>
-        <p:cNvGrpSpPr/>
-        <p:nvPr/>
-      </p:nvGrpSpPr>
-      <p:grpSpPr/>
-      <p:sp>
-        <p:nvSpPr>
-          <p:cNvPr id="2" name="TextBox 1"/>
-          <p:cNvSpPr txBox="1"/>
-          <p:nvPr/>
-        </p:nvSpPr>
-        <p:spPr>
-          <a:xfrm>
-            <a:off x="548640" y="411480"/>
-            <a:ext cx="11064240" cy="777240"/>
-          </a:xfrm>
-          <a:prstGeom prst="rect">
-            <a:avLst/>
-          </a:prstGeom>
-          <a:noFill/>
-        </p:spPr>
-        <p:txBody>
-          <a:bodyPr wrap="square">
-            <a:noAutofit/>
-          </a:bodyPr>
-          <a:lstStyle/>
-          <a:p>
-            <a:pPr>
-              <a:lnSpc>
-                <a:spcPts val="2200"/>
-              </a:lnSpc>
-            </a:pPr>
-            <a:r>
-              <a:rPr sz="2800" b="1">
-                <a:solidFill>
-                  <a:srgbClr val="1A1A2E"/>
-                </a:solidFill>
-                <a:latin typeface="Calibri"/>
-              </a:rPr>
-              <a:t>D, E, F unchanged</a:t>
-            </a:r>
-          </a:p>
-        </p:txBody>
-      </p:sp>
-      <p:pic>
-        <p:nvPicPr>
-          <p:cNvPr id="3" name="Picture 2" descr="05-unchanged.png"/>
-          <p:cNvPicPr>
-            <a:picLocks noChangeAspect="1"/>
-          </p:cNvPicPr>
-          <p:nvPr/>
-        </p:nvPicPr>
-        <p:blipFill>
-          <a:blip r:embed="rId2"/>
-          <a:stretch>
-            <a:fillRect/>
-          </a:stretch>
-        </p:blipFill>
-        <p:spPr>
-          <a:xfrm>
-            <a:off x="548640" y="1143000"/>
-            <a:ext cx="9404113" cy="4572000"/>
-          </a:xfrm>
-          <a:prstGeom prst="rect">
-            <a:avLst/>
-          </a:prstGeom>
-        </p:spPr>
-      </p:pic>
-      <p:sp>
-        <p:nvSpPr>
-          <p:cNvPr id="4" name="TextBox 3"/>
-          <p:cNvSpPr txBox="1"/>
-          <p:nvPr/>
-        </p:nvSpPr>
-        <p:spPr>
-          <a:xfrm>
-            <a:off x="548640" y="5897880"/>
-            <a:ext cx="11064240" cy="411480"/>
-          </a:xfrm>
-          <a:prstGeom prst="rect">
-            <a:avLst/>
-          </a:prstGeom>
-          <a:noFill/>
-        </p:spPr>
-        <p:txBody>
-          <a:bodyPr wrap="square">
-            <a:noAutofit/>
-          </a:bodyPr>
-          <a:lstStyle/>
-          <a:p>
-            <a:pPr>
-              <a:lnSpc>
-                <a:spcPts val="2200"/>
-              </a:lnSpc>
-            </a:pPr>
-            <a:r>
-              <a:rPr sz="1200" b="0">
-                <a:solidFill>
-                  <a:srgbClr val="333333"/>
-                </a:solidFill>
-                <a:latin typeface="Calibri"/>
-              </a:rPr>
-              <a:t>D, E, F unchanged</a:t>
-            </a:r>
-          </a:p>
-        </p:txBody>
-      </p:sp>
-      <p:sp>
-        <p:nvSpPr>
-          <p:cNvPr id="5" name="TextBox 4"/>
-          <p:cNvSpPr txBox="1"/>
-          <p:nvPr/>
-        </p:nvSpPr>
-        <p:spPr>
-          <a:xfrm>
-            <a:off x="548640" y="6355080"/>
-            <a:ext cx="11064240" cy="320040"/>
-          </a:xfrm>
-          <a:prstGeom prst="rect">
-            <a:avLst/>
-          </a:prstGeom>
-          <a:noFill/>
-        </p:spPr>
-        <p:txBody>
-          <a:bodyPr wrap="square">
-            <a:noAutofit/>
-          </a:bodyPr>
-          <a:lstStyle/>
-          <a:p>
-            <a:pPr algn="r">
-              <a:lnSpc>
-                <a:spcPts val="2200"/>
-              </a:lnSpc>
-              <a:defRPr sz="1000" b="0">
-                <a:solidFill>
-                  <a:srgbClr val="666666"/>
-                </a:solidFill>
-                <a:latin typeface="Calibri"/>
-              </a:defRPr>
-            </a:pPr>
-            <a:r>
-              <a:t>learn_legalization — 03 overlap removal</a:t>
-            </a:r>
-          </a:p>
-        </p:txBody>
-      </p:sp>
-    </p:spTree>
-  </p:cSld>
-  <p:clrMapOvr>
-    <a:masterClrMapping/>
-  </p:clrMapOvr>
-</p:sld>
-</file>
-
-<file path=ppt/slides/slide8.xml><?xml version="1.0" encoding="utf-8"?>
-<p:sld xmlns:a="http://schemas.openxmlformats.org/drawingml/2006/main" xmlns:p="http://schemas.openxmlformats.org/presentationml/2006/main" xmlns:r="http://schemas.openxmlformats.org/officeDocument/2006/relationships">
-  <p:cSld>
-    <p:spTree>
-      <p:nvGrpSpPr>
-        <p:cNvPr id="1" name=""/>
-        <p:cNvGrpSpPr/>
-        <p:nvPr/>
-      </p:nvGrpSpPr>
-      <p:grpSpPr/>
-      <p:sp>
-        <p:nvSpPr>
-          <p:cNvPr id="2" name="TextBox 1"/>
-          <p:cNvSpPr txBox="1"/>
-          <p:nvPr/>
-        </p:nvSpPr>
-        <p:spPr>
-          <a:xfrm>
-            <a:off x="548640" y="411480"/>
-            <a:ext cx="11064240" cy="777240"/>
-          </a:xfrm>
-          <a:prstGeom prst="rect">
-            <a:avLst/>
-          </a:prstGeom>
-          <a:noFill/>
-        </p:spPr>
-        <p:txBody>
-          <a:bodyPr wrap="square">
-            <a:noAutofit/>
-          </a:bodyPr>
-          <a:lstStyle/>
-          <a:p>
-            <a:pPr>
-              <a:lnSpc>
-                <a:spcPts val="2200"/>
-              </a:lnSpc>
-            </a:pPr>
-            <a:r>
-              <a:rPr sz="2800" b="1">
-                <a:solidFill>
-                  <a:srgbClr val="1A1A2E"/>
-                </a:solidFill>
-                <a:latin typeface="Calibri"/>
-              </a:rPr>
-              <a:t>Browser lab track</a:t>
-            </a:r>
-          </a:p>
-        </p:txBody>
-      </p:sp>
-      <p:sp>
-        <p:nvSpPr>
-          <p:cNvPr id="3" name="TextBox 2"/>
-          <p:cNvSpPr txBox="1"/>
-          <p:nvPr/>
-        </p:nvSpPr>
-        <p:spPr>
-          <a:xfrm>
-            <a:off x="548640" y="1234440"/>
-            <a:ext cx="11064240" cy="4937760"/>
-          </a:xfrm>
-          <a:prstGeom prst="rect">
-            <a:avLst/>
-          </a:prstGeom>
-          <a:noFill/>
-        </p:spPr>
-        <p:txBody>
-          <a:bodyPr wrap="square">
-            <a:noAutofit/>
-          </a:bodyPr>
-          <a:lstStyle/>
-          <a:p>
-            <a:pPr lvl="0" marL="457200" indent="-228600">
-              <a:buFont typeface="Calibri"/>
-              <a:spcAft>
-                <a:spcPts val="1000"/>
-              </a:spcAft>
-              <a:buSzPct val="100000"/>
-              <a:buChar char="•"/>
-              <a:lnSpc>
-                <a:spcPts val="2200"/>
-              </a:lnSpc>
-            </a:pPr>
-            <a:r>
-              <a:rPr sz="2000" b="0">
-                <a:solidFill>
-                  <a:srgbClr val="333333"/>
-                </a:solidFill>
-                <a:latin typeface="Calibri"/>
-              </a:rPr>
-              <a:t>In the browser lab track, open the </a:t>
-            </a:r>
-            <a:r>
-              <a:rPr sz="2000" b="1">
-                <a:solidFill>
-                  <a:srgbClr val="333333"/>
-                </a:solidFill>
-                <a:latin typeface="Calibri"/>
-              </a:rPr>
-              <a:t>overlap-removal</a:t>
-            </a:r>
-            <a:r>
-              <a:rPr sz="2000" b="0">
-                <a:solidFill>
-                  <a:srgbClr val="333333"/>
-                </a:solidFill>
-                <a:latin typeface="Calibri"/>
-              </a:rPr>
-              <a:t> lab from the tools shelf</a:t>
-            </a:r>
-          </a:p>
-          <a:p>
-            <a:pPr lvl="0" marL="457200" indent="-228600">
-              <a:buFont typeface="Calibri"/>
-              <a:spcAft>
-                <a:spcPts val="1000"/>
-              </a:spcAft>
-              <a:buSzPct val="100000"/>
-              <a:buChar char="•"/>
-              <a:lnSpc>
-                <a:spcPts val="2200"/>
-              </a:lnSpc>
-            </a:pPr>
-            <a:r>
-              <a:rPr sz="2000" b="0">
-                <a:solidFill>
-                  <a:srgbClr val="333333"/>
-                </a:solidFill>
-                <a:latin typeface="Calibri"/>
-              </a:rPr>
-              <a:t>Load the overlap or float starter, run the legalizer once</a:t>
-            </a:r>
-          </a:p>
-          <a:p>
-            <a:pPr lvl="0" marL="457200" indent="-228600">
-              <a:buFont typeface="Calibri"/>
-              <a:spcAft>
-                <a:spcPts val="1000"/>
-              </a:spcAft>
-              <a:buSzPct val="100000"/>
-              <a:buChar char="•"/>
-              <a:lnSpc>
-                <a:spcPts val="2200"/>
-              </a:lnSpc>
-            </a:pPr>
-            <a:r>
-              <a:rPr sz="2000" b="0">
-                <a:solidFill>
-                  <a:srgbClr val="333333"/>
-                </a:solidFill>
-                <a:latin typeface="Calibri"/>
-              </a:rPr>
-              <a:t>Work the challenges that lock the goldens</a:t>
-            </a:r>
-          </a:p>
-        </p:txBody>
-      </p:sp>
-      <p:sp>
-        <p:nvSpPr>
-          <p:cNvPr id="4" name="TextBox 3"/>
-          <p:cNvSpPr txBox="1"/>
-          <p:nvPr/>
-        </p:nvSpPr>
-        <p:spPr>
-          <a:xfrm>
-            <a:off x="548640" y="6355080"/>
-            <a:ext cx="11064240" cy="320040"/>
-          </a:xfrm>
-          <a:prstGeom prst="rect">
-            <a:avLst/>
-          </a:prstGeom>
-          <a:noFill/>
-        </p:spPr>
-        <p:txBody>
-          <a:bodyPr wrap="square">
-            <a:noAutofit/>
-          </a:bodyPr>
-          <a:lstStyle/>
-          <a:p>
-            <a:pPr algn="r">
-              <a:lnSpc>
-                <a:spcPts val="2200"/>
-              </a:lnSpc>
-              <a:defRPr sz="1000" b="0">
-                <a:solidFill>
-                  <a:srgbClr val="666666"/>
-                </a:solidFill>
-                <a:latin typeface="Calibri"/>
-              </a:defRPr>
-            </a:pPr>
-            <a:r>
-              <a:t>learn_legalization — 03 overlap removal</a:t>
-            </a:r>
-          </a:p>
-        </p:txBody>
-      </p:sp>
-    </p:spTree>
-  </p:cSld>
-  <p:clrMapOvr>
-    <a:masterClrMapping/>
-  </p:clrMapOvr>
-</p:sld>
-</file>
-
-<file path=ppt/slides/slide9.xml><?xml version="1.0" encoding="utf-8"?>
-<p:sld xmlns:a="http://schemas.openxmlformats.org/drawingml/2006/main" xmlns:p="http://schemas.openxmlformats.org/presentationml/2006/main" xmlns:r="http://schemas.openxmlformats.org/officeDocument/2006/relationships">
-  <p:cSld>
-    <p:spTree>
-      <p:nvGrpSpPr>
-        <p:cNvPr id="1" name=""/>
-        <p:cNvGrpSpPr/>
-        <p:nvPr/>
-      </p:nvGrpSpPr>
-      <p:grpSpPr/>
-      <p:sp>
-        <p:nvSpPr>
-          <p:cNvPr id="2" name="TextBox 1"/>
-          <p:cNvSpPr txBox="1"/>
-          <p:nvPr/>
-        </p:nvSpPr>
-        <p:spPr>
-          <a:xfrm>
-            <a:off x="548640" y="411480"/>
-            <a:ext cx="11064240" cy="777240"/>
-          </a:xfrm>
-          <a:prstGeom prst="rect">
-            <a:avLst/>
-          </a:prstGeom>
-          <a:noFill/>
-        </p:spPr>
-        <p:txBody>
-          <a:bodyPr wrap="square">
-            <a:noAutofit/>
-          </a:bodyPr>
-          <a:lstStyle/>
-          <a:p>
-            <a:pPr>
-              <a:lnSpc>
-                <a:spcPts val="2200"/>
-              </a:lnSpc>
-            </a:pPr>
-            <a:r>
-              <a:rPr sz="2800" b="1">
-                <a:solidFill>
-                  <a:srgbClr val="1A1A2E"/>
-                </a:solidFill>
-                <a:latin typeface="Calibri"/>
-              </a:rPr>
-              <a:t>Implement track</a:t>
-            </a:r>
-          </a:p>
-        </p:txBody>
-      </p:sp>
-      <p:sp>
-        <p:nvSpPr>
-          <p:cNvPr id="3" name="TextBox 2"/>
-          <p:cNvSpPr txBox="1"/>
-          <p:nvPr/>
-        </p:nvSpPr>
-        <p:spPr>
-          <a:xfrm>
-            <a:off x="548640" y="1234440"/>
-            <a:ext cx="11064240" cy="4937760"/>
-          </a:xfrm>
-          <a:prstGeom prst="rect">
-            <a:avLst/>
-          </a:prstGeom>
-          <a:noFill/>
-        </p:spPr>
-        <p:txBody>
-          <a:bodyPr wrap="square">
-            <a:noAutofit/>
-          </a:bodyPr>
-          <a:lstStyle/>
-          <a:p>
-            <a:pPr lvl="0" marL="457200" indent="-228600">
-              <a:buFont typeface="Calibri"/>
-              <a:spcAft>
-                <a:spcPts val="1000"/>
-              </a:spcAft>
-              <a:buSzPct val="100000"/>
-              <a:buChar char="•"/>
-              <a:lnSpc>
-                <a:spcPts val="2200"/>
-              </a:lnSpc>
-            </a:pPr>
-            <a:r>
-              <a:rPr sz="2000" b="0">
-                <a:solidFill>
-                  <a:srgbClr val="333333"/>
-                </a:solidFill>
-                <a:latin typeface="Calibri"/>
-              </a:rPr>
-              <a:t>In the implement track, open this module's examples and the course `common/` solvers</a:t>
-            </a:r>
-          </a:p>
-          <a:p>
-            <a:pPr lvl="0" marL="457200" indent="-228600">
-              <a:buFont typeface="Calibri"/>
-              <a:spcAft>
-                <a:spcPts val="1000"/>
-              </a:spcAft>
-              <a:buSzPct val="100000"/>
-              <a:buChar char="•"/>
-              <a:lnSpc>
-                <a:spcPts val="2200"/>
-              </a:lnSpc>
-            </a:pPr>
-            <a:r>
-              <a:rPr sz="2000" b="0">
-                <a:solidFill>
-                  <a:srgbClr val="333333"/>
-                </a:solidFill>
-                <a:latin typeface="Calibri"/>
-              </a:rPr>
-              <a:t>Parse `tiny_legal.json`, run the algorithm with deterministic coordinates</a:t>
-            </a:r>
-          </a:p>
-          <a:p>
-            <a:pPr lvl="0" marL="457200" indent="-228600">
-              <a:buFont typeface="Calibri"/>
-              <a:spcAft>
-                <a:spcPts val="1000"/>
-              </a:spcAft>
-              <a:buSzPct val="100000"/>
-              <a:buChar char="•"/>
-              <a:lnSpc>
-                <a:spcPts val="2200"/>
-              </a:lnSpc>
-            </a:pPr>
-            <a:r>
-              <a:rPr sz="2000" b="0">
-                <a:solidFill>
-                  <a:srgbClr val="333333"/>
-                </a:solidFill>
-                <a:latin typeface="Calibri"/>
-              </a:rPr>
-              <a:t>Match the browser goldens before you claim the checklist</a:t>
-            </a:r>
-          </a:p>
-        </p:txBody>
-      </p:sp>
-      <p:sp>
-        <p:nvSpPr>
-          <p:cNvPr id="4" name="TextBox 3"/>
           <p:cNvSpPr txBox="1"/>
           <p:nvPr/>
         </p:nvSpPr>
